--- a/docs/task2/slides/toolshed-hire-task-2.pptx
+++ b/docs/task2/slides/toolshed-hire-task-2.pptx
@@ -121,19 +121,19 @@
   <p:extLst>
     <p:ext uri="{521415D9-36F7-43E2-AB2F-B90AF26B5E84}">
       <p14:sectionLst xmlns:p14="http://schemas.microsoft.com/office/powerpoint/2010/main">
-        <p14:section name="Opening" id="{893e9cc4-53d4-bb65-e48f-7836cf4c59dc}">
+        <p14:section name="Opening" id="{0fb5acc7-47e1-56c0-b488-12337f2771bf}">
           <p14:sldIdLst>
             <p14:sldId id="256"/>
           </p14:sldIdLst>
         </p14:section>
-        <p14:section name="The problem and the requirements" id="{5e7bfeb9-b3ab-5a91-a631-9c3577b78e56}">
+        <p14:section name="The problem and the requirements" id="{043fdbd7-bc97-2f5f-241c-7df38d7198ae}">
           <p14:sldIdLst>
             <p14:sldId id="257"/>
             <p14:sldId id="258"/>
             <p14:sldId id="259"/>
           </p14:sldIdLst>
         </p14:section>
-        <p14:section name="How it is built" id="{bad655a6-b7e6-a274-6188-81ace9376cf8}">
+        <p14:section name="How it is built" id="{5c7f082b-10e8-ea88-1d81-14575d9f9d14}">
           <p14:sldIdLst>
             <p14:sldId id="260"/>
             <p14:sldId id="261"/>
@@ -141,25 +141,25 @@
             <p14:sldId id="263"/>
           </p14:sldIdLst>
         </p14:section>
-        <p14:section name="How it is delivered" id="{9374f36d-ce39-22fc-cf4b-9942507ee6a9}">
+        <p14:section name="How it is delivered" id="{fd97d94b-0ff4-023b-5b91-969050f13a09}">
           <p14:sldIdLst>
             <p14:sldId id="264"/>
             <p14:sldId id="265"/>
           </p14:sldIdLst>
         </p14:section>
-        <p14:section name="Live demonstration" id="{6a05d273-67c9-9d3f-addc-8a5a5374b03b}">
+        <p14:section name="Live demonstration" id="{2c9eda83-7354-e3f6-bd62-30972ebe0555}">
           <p14:sldIdLst>
             <p14:sldId id="266"/>
           </p14:sldIdLst>
         </p14:section>
-        <p14:section name="Testing, deviations and what is next" id="{4a1e1ee0-0ce5-7103-4a17-0ad6726f0ccf}">
+        <p14:section name="Testing, deviations and what is next" id="{fa1e855b-89fb-3c12-8176-55fb3e370b3a}">
           <p14:sldIdLst>
             <p14:sldId id="267"/>
             <p14:sldId id="268"/>
             <p14:sldId id="269"/>
           </p14:sldIdLst>
         </p14:section>
-        <p14:section name="Close" id="{959c4aeb-f17c-7c90-4466-3183029ba054}">
+        <p14:section name="Close" id="{b2dbfc3a-88bf-2f2a-d52d-714c8155b66e}">
           <p14:sldIdLst>
             <p14:sldId id="270"/>
           </p14:sldIdLst>
@@ -6212,7 +6212,7 @@
                   <a:schemeClr val="tx1"/>
                 </a:solidFill>
               </a:rPr>
-              <a:t>4,618</a:t>
+              <a:t>4,623</a:t>
             </a:r>
             <a:endParaRPr lang="en-US" sz="3600" dirty="0"/>
           </a:p>
@@ -6424,7 +6424,7 @@
                   <a:schemeClr val="tx1"/>
                 </a:solidFill>
               </a:rPr>
-              <a:t>1,443</a:t>
+              <a:t>1,455</a:t>
             </a:r>
             <a:endParaRPr lang="en-US" sz="3600" dirty="0"/>
           </a:p>
@@ -9270,8 +9270,8 @@
         </p:nvSpPr>
         <p:spPr>
           <a:xfrm>
-            <a:off x="5105095" y="1865376"/>
-            <a:ext cx="822960" cy="292608"/>
+            <a:off x="5013655" y="1865376"/>
+            <a:ext cx="713232" cy="292608"/>
           </a:xfrm>
           <a:prstGeom prst="roundRect">
             <a:avLst>
@@ -9313,8 +9313,8 @@
         </p:nvSpPr>
         <p:spPr>
           <a:xfrm>
-            <a:off x="6019495" y="1865376"/>
-            <a:ext cx="822960" cy="292608"/>
+            <a:off x="5800039" y="1865376"/>
+            <a:ext cx="713232" cy="292608"/>
           </a:xfrm>
           <a:prstGeom prst="roundRect">
             <a:avLst>
@@ -9356,8 +9356,8 @@
         </p:nvSpPr>
         <p:spPr>
           <a:xfrm>
-            <a:off x="6933895" y="1865376"/>
-            <a:ext cx="822960" cy="292608"/>
+            <a:off x="6586423" y="1865376"/>
+            <a:ext cx="713232" cy="292608"/>
           </a:xfrm>
           <a:prstGeom prst="roundRect">
             <a:avLst>
@@ -9399,8 +9399,8 @@
         </p:nvSpPr>
         <p:spPr>
           <a:xfrm>
-            <a:off x="7848295" y="1865376"/>
-            <a:ext cx="822960" cy="292608"/>
+            <a:off x="7372807" y="1865376"/>
+            <a:ext cx="713232" cy="292608"/>
           </a:xfrm>
           <a:prstGeom prst="roundRect">
             <a:avLst>
@@ -9436,14 +9436,14 @@
       </p:sp>
       <p:sp>
         <p:nvSpPr>
-          <p:cNvPr id="11" name="Release task2-v1.0 626"/>
-          <p:cNvSpPr/>
-          <p:nvPr/>
-        </p:nvSpPr>
-        <p:spPr>
-          <a:xfrm>
-            <a:off x="8762695" y="1865376"/>
-            <a:ext cx="1097280" cy="292608"/>
+          <p:cNvPr id="11" name="Release v0.4.1 626"/>
+          <p:cNvSpPr/>
+          <p:nvPr/>
+        </p:nvSpPr>
+        <p:spPr>
+          <a:xfrm>
+            <a:off x="8159191" y="1865376"/>
+            <a:ext cx="713232" cy="292608"/>
           </a:xfrm>
           <a:prstGeom prst="roundRect">
             <a:avLst>
@@ -9451,7 +9451,7 @@
             </a:avLst>
           </a:prstGeom>
           <a:solidFill>
-            <a:schemeClr val="accent1"/>
+            <a:schemeClr val="tx1"/>
           </a:solidFill>
           <a:ln/>
         </p:spPr>
@@ -9463,14 +9463,57 @@
               <a:buNone/>
             </a:pPr>
             <a:r>
-              <a:rPr lang="en-US" sz="1100" b="1" dirty="0">
-                <a:solidFill>
-                  <a:schemeClr val="tx1"/>
+              <a:rPr lang="en-US" sz="1100" dirty="0">
+                <a:solidFill>
+                  <a:schemeClr val="bg1"/>
                 </a:solidFill>
                 <a:latin typeface="Consolas" pitchFamily="34" charset="0"/>
                 <a:ea typeface="Consolas" pitchFamily="34" charset="-122"/>
                 <a:cs typeface="Consolas" pitchFamily="34" charset="-120"/>
               </a:rPr>
+              <a:t>v0.4.1</a:t>
+            </a:r>
+            <a:endParaRPr lang="en-US" sz="1100" dirty="0"/>
+          </a:p>
+        </p:txBody>
+      </p:sp>
+      <p:sp>
+        <p:nvSpPr>
+          <p:cNvPr id="12" name="Release task2-v1.0 627"/>
+          <p:cNvSpPr/>
+          <p:nvPr/>
+        </p:nvSpPr>
+        <p:spPr>
+          <a:xfrm>
+            <a:off x="8945575" y="1865376"/>
+            <a:ext cx="1024128" cy="292608"/>
+          </a:xfrm>
+          <a:prstGeom prst="roundRect">
+            <a:avLst>
+              <a:gd name="adj" fmla="val 50000"/>
+            </a:avLst>
+          </a:prstGeom>
+          <a:solidFill>
+            <a:schemeClr val="accent1"/>
+          </a:solidFill>
+          <a:ln/>
+        </p:spPr>
+        <p:txBody>
+          <a:bodyPr wrap="square" lIns="25400" tIns="25400" rIns="25400" bIns="25400" rtlCol="0" anchor="ctr"/>
+          <a:lstStyle/>
+          <a:p>
+            <a:pPr algn="ctr" indent="0" marL="0">
+              <a:buNone/>
+            </a:pPr>
+            <a:r>
+              <a:rPr lang="en-US" sz="1100" b="1" dirty="0">
+                <a:solidFill>
+                  <a:schemeClr val="tx1"/>
+                </a:solidFill>
+                <a:latin typeface="Consolas" pitchFamily="34" charset="0"/>
+                <a:ea typeface="Consolas" pitchFamily="34" charset="-122"/>
+                <a:cs typeface="Consolas" pitchFamily="34" charset="-120"/>
+              </a:rPr>
               <a:t>task2-v1.0</a:t>
             </a:r>
             <a:endParaRPr lang="en-US" sz="1100" dirty="0"/>
@@ -9479,14 +9522,14 @@
       </p:sp>
       <p:sp>
         <p:nvSpPr>
-          <p:cNvPr id="12" name="Release v1.0.0 in Task 3 627"/>
-          <p:cNvSpPr/>
-          <p:nvPr/>
-        </p:nvSpPr>
-        <p:spPr>
-          <a:xfrm>
-            <a:off x="9951415" y="1865376"/>
-            <a:ext cx="1508760" cy="292608"/>
+          <p:cNvPr id="13" name="Release v1.0.0 in Task 3 628"/>
+          <p:cNvSpPr/>
+          <p:nvPr/>
+        </p:nvSpPr>
+        <p:spPr>
+          <a:xfrm>
+            <a:off x="10042855" y="1865376"/>
+            <a:ext cx="1417320" cy="292608"/>
           </a:xfrm>
           <a:prstGeom prst="roundRect">
             <a:avLst>
@@ -9527,7 +9570,7 @@
       </p:sp>
       <p:sp>
         <p:nvSpPr>
-          <p:cNvPr id="13" name="Branch 001 628"/>
+          <p:cNvPr id="14" name="Branch 001 629"/>
           <p:cNvSpPr/>
           <p:nvPr/>
         </p:nvSpPr>
@@ -9570,7 +9613,7 @@
       </p:sp>
       <p:sp>
         <p:nvSpPr>
-          <p:cNvPr id="14" name="Branch 002 629"/>
+          <p:cNvPr id="15" name="Branch 002 630"/>
           <p:cNvSpPr/>
           <p:nvPr/>
         </p:nvSpPr>
@@ -9613,7 +9656,7 @@
       </p:sp>
       <p:sp>
         <p:nvSpPr>
-          <p:cNvPr id="15" name="Branch 003 630"/>
+          <p:cNvPr id="16" name="Branch 003 631"/>
           <p:cNvSpPr/>
           <p:nvPr/>
         </p:nvSpPr>
@@ -9656,7 +9699,7 @@
       </p:sp>
       <p:sp>
         <p:nvSpPr>
-          <p:cNvPr id="16" name="Branch 004 631"/>
+          <p:cNvPr id="17" name="Branch 004 632"/>
           <p:cNvSpPr/>
           <p:nvPr/>
         </p:nvSpPr>
@@ -9699,7 +9742,7 @@
       </p:sp>
       <p:sp>
         <p:nvSpPr>
-          <p:cNvPr id="17" name="Branch 005 632"/>
+          <p:cNvPr id="18" name="Branch 005 633"/>
           <p:cNvSpPr/>
           <p:nvPr/>
         </p:nvSpPr>
@@ -9742,7 +9785,7 @@
       </p:sp>
       <p:sp>
         <p:nvSpPr>
-          <p:cNvPr id="18" name="Branch 006 633"/>
+          <p:cNvPr id="19" name="Branch 006 634"/>
           <p:cNvSpPr/>
           <p:nvPr/>
         </p:nvSpPr>
@@ -9785,7 +9828,7 @@
       </p:sp>
       <p:sp>
         <p:nvSpPr>
-          <p:cNvPr id="19" name="Branch 007 634"/>
+          <p:cNvPr id="20" name="Branch 007 635"/>
           <p:cNvSpPr/>
           <p:nvPr/>
         </p:nvSpPr>
@@ -9828,7 +9871,7 @@
       </p:sp>
       <p:sp>
         <p:nvSpPr>
-          <p:cNvPr id="20" name="Branch 008 635"/>
+          <p:cNvPr id="21" name="Branch 008 636"/>
           <p:cNvSpPr/>
           <p:nvPr/>
         </p:nvSpPr>
@@ -9871,7 +9914,7 @@
       </p:sp>
       <p:sp>
         <p:nvSpPr>
-          <p:cNvPr id="21" name="Branch 009 636"/>
+          <p:cNvPr id="22" name="Branch 009 637"/>
           <p:cNvSpPr/>
           <p:nvPr/>
         </p:nvSpPr>
@@ -9914,7 +9957,7 @@
       </p:sp>
       <p:sp>
         <p:nvSpPr>
-          <p:cNvPr id="22" name="Branch 010 637"/>
+          <p:cNvPr id="23" name="Branch 010 638"/>
           <p:cNvSpPr/>
           <p:nvPr/>
         </p:nvSpPr>
@@ -9957,7 +10000,7 @@
       </p:sp>
       <p:sp>
         <p:nvSpPr>
-          <p:cNvPr id="23" name="Branch 011 638"/>
+          <p:cNvPr id="24" name="Branch 011 639"/>
           <p:cNvSpPr/>
           <p:nvPr/>
         </p:nvSpPr>
@@ -10000,7 +10043,7 @@
       </p:sp>
       <p:sp>
         <p:nvSpPr>
-          <p:cNvPr id="24" name="Branch 012 639"/>
+          <p:cNvPr id="25" name="Branch 012 640"/>
           <p:cNvSpPr/>
           <p:nvPr/>
         </p:nvSpPr>
@@ -10043,7 +10086,7 @@
       </p:sp>
       <p:sp>
         <p:nvSpPr>
-          <p:cNvPr id="25" name="Branch 013 640"/>
+          <p:cNvPr id="26" name="Branch 013 641"/>
           <p:cNvSpPr/>
           <p:nvPr/>
         </p:nvSpPr>
@@ -10086,7 +10129,7 @@
       </p:sp>
       <p:sp>
         <p:nvSpPr>
-          <p:cNvPr id="26" name="Branch 014 641"/>
+          <p:cNvPr id="27" name="Branch 014 642"/>
           <p:cNvSpPr/>
           <p:nvPr/>
         </p:nvSpPr>
@@ -10129,7 +10172,7 @@
       </p:sp>
       <p:sp>
         <p:nvSpPr>
-          <p:cNvPr id="27" name="Branch 015 642"/>
+          <p:cNvPr id="28" name="Branch 015 643"/>
           <p:cNvSpPr/>
           <p:nvPr/>
         </p:nvSpPr>
@@ -10172,7 +10215,7 @@
       </p:sp>
       <p:sp>
         <p:nvSpPr>
-          <p:cNvPr id="28" name="Branch 016 643"/>
+          <p:cNvPr id="29" name="Branch 016 644"/>
           <p:cNvSpPr/>
           <p:nvPr/>
         </p:nvSpPr>
@@ -10215,7 +10258,7 @@
       </p:sp>
       <p:sp>
         <p:nvSpPr>
-          <p:cNvPr id="29" name="Branch 017 644"/>
+          <p:cNvPr id="30" name="Branch 017 645"/>
           <p:cNvSpPr/>
           <p:nvPr/>
         </p:nvSpPr>
@@ -10258,7 +10301,7 @@
       </p:sp>
       <p:sp>
         <p:nvSpPr>
-          <p:cNvPr id="30" name="Branch 018 645"/>
+          <p:cNvPr id="31" name="Branch 018 646"/>
           <p:cNvSpPr/>
           <p:nvPr/>
         </p:nvSpPr>
@@ -10301,7 +10344,7 @@
       </p:sp>
       <p:sp>
         <p:nvSpPr>
-          <p:cNvPr id="31" name="Branch 019 646"/>
+          <p:cNvPr id="32" name="Branch 019 647"/>
           <p:cNvSpPr/>
           <p:nvPr/>
         </p:nvSpPr>
@@ -10344,7 +10387,7 @@
       </p:sp>
       <p:sp>
         <p:nvSpPr>
-          <p:cNvPr id="32" name="Branch 020 647"/>
+          <p:cNvPr id="33" name="Branch 020 648"/>
           <p:cNvSpPr/>
           <p:nvPr/>
         </p:nvSpPr>
@@ -10387,7 +10430,7 @@
       </p:sp>
       <p:sp>
         <p:nvSpPr>
-          <p:cNvPr id="33" name="Branch 021 648"/>
+          <p:cNvPr id="34" name="Branch 021 649"/>
           <p:cNvSpPr/>
           <p:nvPr/>
         </p:nvSpPr>
@@ -10430,7 +10473,7 @@
       </p:sp>
       <p:sp>
         <p:nvSpPr>
-          <p:cNvPr id="34" name="Branch 022 649"/>
+          <p:cNvPr id="35" name="Branch 022 650"/>
           <p:cNvSpPr/>
           <p:nvPr/>
         </p:nvSpPr>
@@ -10473,7 +10516,7 @@
       </p:sp>
       <p:sp>
         <p:nvSpPr>
-          <p:cNvPr id="35" name="Card 650"/>
+          <p:cNvPr id="36" name="Card 651"/>
           <p:cNvSpPr/>
           <p:nvPr/>
         </p:nvSpPr>
@@ -10507,7 +10550,7 @@
       </p:sp>
       <p:sp>
         <p:nvSpPr>
-          <p:cNvPr id="36" name="Icon doc 651"/>
+          <p:cNvPr id="37" name="Icon doc 652"/>
           <p:cNvSpPr/>
           <p:nvPr/>
         </p:nvSpPr>
@@ -10527,7 +10570,7 @@
       </p:sp>
       <p:sp>
         <p:nvSpPr>
-          <p:cNvPr id="37" name="Glyph part 653"/>
+          <p:cNvPr id="38" name="Glyph part 654"/>
           <p:cNvSpPr/>
           <p:nvPr/>
         </p:nvSpPr>
@@ -10547,7 +10590,7 @@
       </p:sp>
       <p:sp>
         <p:nvSpPr>
-          <p:cNvPr id="38" name="Glyph part 654"/>
+          <p:cNvPr id="39" name="Glyph part 655"/>
           <p:cNvSpPr/>
           <p:nvPr/>
         </p:nvSpPr>
@@ -10567,7 +10610,7 @@
       </p:sp>
       <p:sp>
         <p:nvSpPr>
-          <p:cNvPr id="39" name="Glyph part 655"/>
+          <p:cNvPr id="40" name="Glyph part 656"/>
           <p:cNvSpPr/>
           <p:nvPr/>
         </p:nvSpPr>
@@ -10587,7 +10630,7 @@
       </p:sp>
       <p:sp>
         <p:nvSpPr>
-          <p:cNvPr id="40" name="Text 656"/>
+          <p:cNvPr id="41" name="Text 657"/>
           <p:cNvSpPr txBox="1"/>
           <p:nvPr/>
         </p:nvSpPr>
@@ -10623,7 +10666,7 @@
       </p:sp>
       <p:sp>
         <p:nvSpPr>
-          <p:cNvPr id="41" name="Text 657"/>
+          <p:cNvPr id="42" name="Text 658"/>
           <p:cNvSpPr txBox="1"/>
           <p:nvPr/>
         </p:nvSpPr>
@@ -10659,7 +10702,7 @@
       </p:sp>
       <p:sp>
         <p:nvSpPr>
-          <p:cNvPr id="42" name="Card 658"/>
+          <p:cNvPr id="43" name="Card 659"/>
           <p:cNvSpPr/>
           <p:nvPr/>
         </p:nvSpPr>
@@ -10693,7 +10736,7 @@
       </p:sp>
       <p:sp>
         <p:nvSpPr>
-          <p:cNvPr id="43" name="Icon camera 659"/>
+          <p:cNvPr id="44" name="Icon camera 660"/>
           <p:cNvSpPr/>
           <p:nvPr/>
         </p:nvSpPr>
@@ -10713,7 +10756,7 @@
       </p:sp>
       <p:sp>
         <p:nvSpPr>
-          <p:cNvPr id="44" name="Glyph part 661"/>
+          <p:cNvPr id="45" name="Glyph part 662"/>
           <p:cNvSpPr/>
           <p:nvPr/>
         </p:nvSpPr>
@@ -10733,7 +10776,7 @@
       </p:sp>
       <p:sp>
         <p:nvSpPr>
-          <p:cNvPr id="45" name="Glyph part 662"/>
+          <p:cNvPr id="46" name="Glyph part 663"/>
           <p:cNvSpPr/>
           <p:nvPr/>
         </p:nvSpPr>
@@ -10755,7 +10798,7 @@
       </p:sp>
       <p:sp>
         <p:nvSpPr>
-          <p:cNvPr id="46" name="Glyph part 663"/>
+          <p:cNvPr id="47" name="Glyph part 664"/>
           <p:cNvSpPr/>
           <p:nvPr/>
         </p:nvSpPr>
@@ -10775,7 +10818,7 @@
       </p:sp>
       <p:sp>
         <p:nvSpPr>
-          <p:cNvPr id="47" name="Glyph part 664"/>
+          <p:cNvPr id="48" name="Glyph part 665"/>
           <p:cNvSpPr/>
           <p:nvPr/>
         </p:nvSpPr>
@@ -10795,7 +10838,7 @@
       </p:sp>
       <p:sp>
         <p:nvSpPr>
-          <p:cNvPr id="48" name="Text 665"/>
+          <p:cNvPr id="49" name="Text 666"/>
           <p:cNvSpPr txBox="1"/>
           <p:nvPr/>
         </p:nvSpPr>
@@ -10831,7 +10874,7 @@
       </p:sp>
       <p:sp>
         <p:nvSpPr>
-          <p:cNvPr id="49" name="Text 666"/>
+          <p:cNvPr id="50" name="Text 667"/>
           <p:cNvSpPr txBox="1"/>
           <p:nvPr/>
         </p:nvSpPr>
@@ -10867,7 +10910,7 @@
       </p:sp>
       <p:sp>
         <p:nvSpPr>
-          <p:cNvPr id="50" name="Card 667"/>
+          <p:cNvPr id="51" name="Card 668"/>
           <p:cNvSpPr/>
           <p:nvPr/>
         </p:nvSpPr>
@@ -10901,7 +10944,7 @@
       </p:sp>
       <p:sp>
         <p:nvSpPr>
-          <p:cNvPr id="51" name="Icon clock 668"/>
+          <p:cNvPr id="52" name="Icon clock 669"/>
           <p:cNvSpPr/>
           <p:nvPr/>
         </p:nvSpPr>
@@ -10921,7 +10964,7 @@
       </p:sp>
       <p:sp>
         <p:nvSpPr>
-          <p:cNvPr id="52" name="Glyph part 670"/>
+          <p:cNvPr id="53" name="Glyph part 671"/>
           <p:cNvSpPr/>
           <p:nvPr/>
         </p:nvSpPr>
@@ -10944,7 +10987,7 @@
       </p:sp>
       <p:sp>
         <p:nvSpPr>
-          <p:cNvPr id="53" name="Glyph stroke 671"/>
+          <p:cNvPr id="54" name="Glyph stroke 672"/>
           <p:cNvSpPr/>
           <p:nvPr/>
         </p:nvSpPr>
@@ -10967,7 +11010,7 @@
       </p:sp>
       <p:sp>
         <p:nvSpPr>
-          <p:cNvPr id="54" name="Glyph stroke 672"/>
+          <p:cNvPr id="55" name="Glyph stroke 673"/>
           <p:cNvSpPr/>
           <p:nvPr/>
         </p:nvSpPr>
@@ -10990,7 +11033,7 @@
       </p:sp>
       <p:sp>
         <p:nvSpPr>
-          <p:cNvPr id="55" name="Text 673"/>
+          <p:cNvPr id="56" name="Text 674"/>
           <p:cNvSpPr txBox="1"/>
           <p:nvPr/>
         </p:nvSpPr>
@@ -11026,7 +11069,7 @@
       </p:sp>
       <p:sp>
         <p:nvSpPr>
-          <p:cNvPr id="56" name="Text 674"/>
+          <p:cNvPr id="57" name="Text 675"/>
           <p:cNvSpPr txBox="1"/>
           <p:nvPr/>
         </p:nvSpPr>
@@ -11062,7 +11105,7 @@
       </p:sp>
       <p:sp>
         <p:nvSpPr>
-          <p:cNvPr id="57" name="Card 675"/>
+          <p:cNvPr id="58" name="Card 676"/>
           <p:cNvSpPr/>
           <p:nvPr/>
         </p:nvSpPr>
@@ -11096,7 +11139,7 @@
       </p:sp>
       <p:sp>
         <p:nvSpPr>
-          <p:cNvPr id="58" name="Icon bolt 676"/>
+          <p:cNvPr id="59" name="Icon bolt 677"/>
           <p:cNvSpPr/>
           <p:nvPr/>
         </p:nvSpPr>
@@ -11116,7 +11159,7 @@
       </p:sp>
       <p:sp>
         <p:nvSpPr>
-          <p:cNvPr id="59" name="Glyph part 678"/>
+          <p:cNvPr id="60" name="Glyph part 679"/>
           <p:cNvSpPr/>
           <p:nvPr/>
         </p:nvSpPr>
@@ -11136,7 +11179,7 @@
       </p:sp>
       <p:sp>
         <p:nvSpPr>
-          <p:cNvPr id="60" name="Text 679"/>
+          <p:cNvPr id="61" name="Text 680"/>
           <p:cNvSpPr txBox="1"/>
           <p:nvPr/>
         </p:nvSpPr>
@@ -11172,7 +11215,7 @@
       </p:sp>
       <p:sp>
         <p:nvSpPr>
-          <p:cNvPr id="61" name="Text 680"/>
+          <p:cNvPr id="62" name="Text 681"/>
           <p:cNvSpPr txBox="1"/>
           <p:nvPr/>
         </p:nvSpPr>
@@ -11208,7 +11251,7 @@
       </p:sp>
       <p:sp>
         <p:nvSpPr>
-          <p:cNvPr id="62" name="Card 681"/>
+          <p:cNvPr id="63" name="Card 682"/>
           <p:cNvSpPr/>
           <p:nvPr/>
         </p:nvSpPr>
@@ -11242,7 +11285,7 @@
       </p:sp>
       <p:sp>
         <p:nvSpPr>
-          <p:cNvPr id="63" name="Icon tag 682"/>
+          <p:cNvPr id="64" name="Icon tag 683"/>
           <p:cNvSpPr/>
           <p:nvPr/>
         </p:nvSpPr>
@@ -11262,7 +11305,7 @@
       </p:sp>
       <p:sp>
         <p:nvSpPr>
-          <p:cNvPr id="64" name="Glyph part 684"/>
+          <p:cNvPr id="65" name="Glyph part 685"/>
           <p:cNvSpPr/>
           <p:nvPr/>
         </p:nvSpPr>
@@ -11282,7 +11325,7 @@
       </p:sp>
       <p:sp>
         <p:nvSpPr>
-          <p:cNvPr id="65" name="Glyph part 685"/>
+          <p:cNvPr id="66" name="Glyph part 686"/>
           <p:cNvSpPr/>
           <p:nvPr/>
         </p:nvSpPr>
@@ -11302,7 +11345,7 @@
       </p:sp>
       <p:sp>
         <p:nvSpPr>
-          <p:cNvPr id="66" name="Text 686"/>
+          <p:cNvPr id="67" name="Text 687"/>
           <p:cNvSpPr txBox="1"/>
           <p:nvPr/>
         </p:nvSpPr>
@@ -11338,7 +11381,7 @@
       </p:sp>
       <p:sp>
         <p:nvSpPr>
-          <p:cNvPr id="67" name="Text 687"/>
+          <p:cNvPr id="68" name="Text 688"/>
           <p:cNvSpPr txBox="1"/>
           <p:nvPr/>
         </p:nvSpPr>
@@ -11482,7 +11525,7 @@
       </p:sp>
       <p:sp>
         <p:nvSpPr>
-          <p:cNvPr id="4" name="Icon browser 688"/>
+          <p:cNvPr id="4" name="Icon browser 689"/>
           <p:cNvSpPr/>
           <p:nvPr/>
         </p:nvSpPr>
@@ -11502,7 +11545,7 @@
       </p:sp>
       <p:sp>
         <p:nvSpPr>
-          <p:cNvPr id="5" name="Glyph part 690"/>
+          <p:cNvPr id="5" name="Glyph part 691"/>
           <p:cNvSpPr/>
           <p:nvPr/>
         </p:nvSpPr>
@@ -11525,7 +11568,7 @@
       </p:sp>
       <p:sp>
         <p:nvSpPr>
-          <p:cNvPr id="6" name="Glyph part 691"/>
+          <p:cNvPr id="6" name="Glyph part 692"/>
           <p:cNvSpPr/>
           <p:nvPr/>
         </p:nvSpPr>
@@ -11545,7 +11588,7 @@
       </p:sp>
       <p:sp>
         <p:nvSpPr>
-          <p:cNvPr id="7" name="Text 692"/>
+          <p:cNvPr id="7" name="Text 693"/>
           <p:cNvSpPr txBox="1"/>
           <p:nvPr/>
         </p:nvSpPr>
@@ -11581,7 +11624,7 @@
       </p:sp>
       <p:sp>
         <p:nvSpPr>
-          <p:cNvPr id="8" name="Icon branch 693"/>
+          <p:cNvPr id="8" name="Icon branch 694"/>
           <p:cNvSpPr/>
           <p:nvPr/>
         </p:nvSpPr>
@@ -11601,7 +11644,7 @@
       </p:sp>
       <p:sp>
         <p:nvSpPr>
-          <p:cNvPr id="9" name="Glyph stroke 695"/>
+          <p:cNvPr id="9" name="Glyph stroke 696"/>
           <p:cNvSpPr/>
           <p:nvPr/>
         </p:nvSpPr>
@@ -11624,7 +11667,7 @@
       </p:sp>
       <p:sp>
         <p:nvSpPr>
-          <p:cNvPr id="10" name="Glyph stroke 696"/>
+          <p:cNvPr id="10" name="Glyph stroke 697"/>
           <p:cNvSpPr/>
           <p:nvPr/>
         </p:nvSpPr>
@@ -11647,7 +11690,7 @@
       </p:sp>
       <p:sp>
         <p:nvSpPr>
-          <p:cNvPr id="11" name="Glyph part 697"/>
+          <p:cNvPr id="11" name="Glyph part 698"/>
           <p:cNvSpPr/>
           <p:nvPr/>
         </p:nvSpPr>
@@ -11667,7 +11710,7 @@
       </p:sp>
       <p:sp>
         <p:nvSpPr>
-          <p:cNvPr id="12" name="Glyph part 698"/>
+          <p:cNvPr id="12" name="Glyph part 699"/>
           <p:cNvSpPr/>
           <p:nvPr/>
         </p:nvSpPr>
@@ -11687,7 +11730,7 @@
       </p:sp>
       <p:sp>
         <p:nvSpPr>
-          <p:cNvPr id="13" name="Glyph part 699"/>
+          <p:cNvPr id="13" name="Glyph part 700"/>
           <p:cNvSpPr/>
           <p:nvPr/>
         </p:nvSpPr>
@@ -11707,7 +11750,7 @@
       </p:sp>
       <p:sp>
         <p:nvSpPr>
-          <p:cNvPr id="14" name="Text 700"/>
+          <p:cNvPr id="14" name="Text 701"/>
           <p:cNvSpPr txBox="1"/>
           <p:nvPr/>
         </p:nvSpPr>
@@ -11743,7 +11786,7 @@
       </p:sp>
       <p:sp>
         <p:nvSpPr>
-          <p:cNvPr id="15" name="Icon person 701"/>
+          <p:cNvPr id="15" name="Icon person 702"/>
           <p:cNvSpPr/>
           <p:nvPr/>
         </p:nvSpPr>
@@ -11763,7 +11806,7 @@
       </p:sp>
       <p:sp>
         <p:nvSpPr>
-          <p:cNvPr id="16" name="Glyph part 703"/>
+          <p:cNvPr id="16" name="Glyph part 704"/>
           <p:cNvSpPr/>
           <p:nvPr/>
         </p:nvSpPr>
@@ -11783,7 +11826,7 @@
       </p:sp>
       <p:sp>
         <p:nvSpPr>
-          <p:cNvPr id="17" name="Glyph part 704"/>
+          <p:cNvPr id="17" name="Glyph part 705"/>
           <p:cNvSpPr/>
           <p:nvPr/>
         </p:nvSpPr>
@@ -11803,7 +11846,7 @@
       </p:sp>
       <p:sp>
         <p:nvSpPr>
-          <p:cNvPr id="18" name="Text 705"/>
+          <p:cNvPr id="18" name="Text 706"/>
           <p:cNvSpPr txBox="1"/>
           <p:nvPr/>
         </p:nvSpPr>
@@ -11839,7 +11882,7 @@
       </p:sp>
       <p:sp>
         <p:nvSpPr>
-          <p:cNvPr id="19" name="Text 706"/>
+          <p:cNvPr id="19" name="Text 707"/>
           <p:cNvSpPr txBox="1"/>
           <p:nvPr/>
         </p:nvSpPr>
@@ -15005,7 +15048,7 @@
                   <a:schemeClr val="tx2"/>
                 </a:solidFill>
               </a:rPr>
-              <a:t>Deployed by the pipeline only, and released as v0.4.0</a:t>
+              <a:t>Deployed by the pipeline only, and live as v0.4.1</a:t>
             </a:r>
             <a:endParaRPr lang="en-US" sz="1400" dirty="0"/>
           </a:p>

--- a/docs/task2/slides/toolshed-hire-task-2.pptx
+++ b/docs/task2/slides/toolshed-hire-task-2.pptx
@@ -121,19 +121,19 @@
   <p:extLst>
     <p:ext uri="{521415D9-36F7-43E2-AB2F-B90AF26B5E84}">
       <p14:sectionLst xmlns:p14="http://schemas.microsoft.com/office/powerpoint/2010/main">
-        <p14:section name="Opening" id="{0fb5acc7-47e1-56c0-b488-12337f2771bf}">
+        <p14:section name="Opening" id="{5376035e-6469-292c-a912-edd4867daf5d}">
           <p14:sldIdLst>
             <p14:sldId id="256"/>
           </p14:sldIdLst>
         </p14:section>
-        <p14:section name="The problem and the requirements" id="{043fdbd7-bc97-2f5f-241c-7df38d7198ae}">
+        <p14:section name="The problem and the requirements" id="{b41b85d0-b771-864c-1d19-9778dec81a5b}">
           <p14:sldIdLst>
             <p14:sldId id="257"/>
             <p14:sldId id="258"/>
             <p14:sldId id="259"/>
           </p14:sldIdLst>
         </p14:section>
-        <p14:section name="How it is built" id="{5c7f082b-10e8-ea88-1d81-14575d9f9d14}">
+        <p14:section name="How it is built" id="{dc2f565a-a945-92c1-0abb-ca5b8f484f53}">
           <p14:sldIdLst>
             <p14:sldId id="260"/>
             <p14:sldId id="261"/>
@@ -141,25 +141,25 @@
             <p14:sldId id="263"/>
           </p14:sldIdLst>
         </p14:section>
-        <p14:section name="How it is delivered" id="{fd97d94b-0ff4-023b-5b91-969050f13a09}">
+        <p14:section name="How it is delivered" id="{6d7738be-29f7-ca2f-df81-e6cd39c133e4}">
           <p14:sldIdLst>
             <p14:sldId id="264"/>
             <p14:sldId id="265"/>
           </p14:sldIdLst>
         </p14:section>
-        <p14:section name="Live demonstration" id="{2c9eda83-7354-e3f6-bd62-30972ebe0555}">
+        <p14:section name="Live demonstration" id="{f6801cd3-cfea-889c-ed6c-5868e2153918}">
           <p14:sldIdLst>
             <p14:sldId id="266"/>
           </p14:sldIdLst>
         </p14:section>
-        <p14:section name="Testing, deviations and what is next" id="{fa1e855b-89fb-3c12-8176-55fb3e370b3a}">
+        <p14:section name="Testing, deviations and what is next" id="{1cda5166-4716-e867-910d-0230dd2ce42e}">
           <p14:sldIdLst>
             <p14:sldId id="267"/>
             <p14:sldId id="268"/>
             <p14:sldId id="269"/>
           </p14:sldIdLst>
         </p14:section>
-        <p14:section name="Close" id="{b2dbfc3a-88bf-2f2a-d52d-714c8155b66e}">
+        <p14:section name="Close" id="{c4a315ea-24d6-aca7-53d4-a69afb4c7c37}">
           <p14:sldIdLst>
             <p14:sldId id="270"/>
           </p14:sldIdLst>
@@ -6424,7 +6424,7 @@
                   <a:schemeClr val="tx1"/>
                 </a:solidFill>
               </a:rPr>
-              <a:t>1,455</a:t>
+              <a:t>1,458</a:t>
             </a:r>
             <a:endParaRPr lang="en-US" sz="3600" dirty="0"/>
           </a:p>
@@ -9270,8 +9270,8 @@
         </p:nvSpPr>
         <p:spPr>
           <a:xfrm>
-            <a:off x="5013655" y="1865376"/>
-            <a:ext cx="713232" cy="292608"/>
+            <a:off x="4638751" y="1865376"/>
+            <a:ext cx="658368" cy="292608"/>
           </a:xfrm>
           <a:prstGeom prst="roundRect">
             <a:avLst>
@@ -9313,8 +9313,8 @@
         </p:nvSpPr>
         <p:spPr>
           <a:xfrm>
-            <a:off x="5800039" y="1865376"/>
-            <a:ext cx="713232" cy="292608"/>
+            <a:off x="5370271" y="1865376"/>
+            <a:ext cx="658368" cy="292608"/>
           </a:xfrm>
           <a:prstGeom prst="roundRect">
             <a:avLst>
@@ -9356,8 +9356,8 @@
         </p:nvSpPr>
         <p:spPr>
           <a:xfrm>
-            <a:off x="6586423" y="1865376"/>
-            <a:ext cx="713232" cy="292608"/>
+            <a:off x="6101791" y="1865376"/>
+            <a:ext cx="658368" cy="292608"/>
           </a:xfrm>
           <a:prstGeom prst="roundRect">
             <a:avLst>
@@ -9399,8 +9399,8 @@
         </p:nvSpPr>
         <p:spPr>
           <a:xfrm>
-            <a:off x="7372807" y="1865376"/>
-            <a:ext cx="713232" cy="292608"/>
+            <a:off x="6833311" y="1865376"/>
+            <a:ext cx="658368" cy="292608"/>
           </a:xfrm>
           <a:prstGeom prst="roundRect">
             <a:avLst>
@@ -9442,8 +9442,8 @@
         </p:nvSpPr>
         <p:spPr>
           <a:xfrm>
-            <a:off x="8159191" y="1865376"/>
-            <a:ext cx="713232" cy="292608"/>
+            <a:off x="7564831" y="1865376"/>
+            <a:ext cx="658368" cy="292608"/>
           </a:xfrm>
           <a:prstGeom prst="roundRect">
             <a:avLst>
@@ -9479,14 +9479,14 @@
       </p:sp>
       <p:sp>
         <p:nvSpPr>
-          <p:cNvPr id="12" name="Release task2-v1.0 627"/>
-          <p:cNvSpPr/>
-          <p:nvPr/>
-        </p:nvSpPr>
-        <p:spPr>
-          <a:xfrm>
-            <a:off x="8945575" y="1865376"/>
-            <a:ext cx="1024128" cy="292608"/>
+          <p:cNvPr id="12" name="Release v0.4.2 627"/>
+          <p:cNvSpPr/>
+          <p:nvPr/>
+        </p:nvSpPr>
+        <p:spPr>
+          <a:xfrm>
+            <a:off x="8296351" y="1865376"/>
+            <a:ext cx="658368" cy="292608"/>
           </a:xfrm>
           <a:prstGeom prst="roundRect">
             <a:avLst>
@@ -9494,7 +9494,7 @@
             </a:avLst>
           </a:prstGeom>
           <a:solidFill>
-            <a:schemeClr val="accent1"/>
+            <a:schemeClr val="tx1"/>
           </a:solidFill>
           <a:ln/>
         </p:spPr>
@@ -9506,14 +9506,57 @@
               <a:buNone/>
             </a:pPr>
             <a:r>
-              <a:rPr lang="en-US" sz="1100" b="1" dirty="0">
-                <a:solidFill>
-                  <a:schemeClr val="tx1"/>
+              <a:rPr lang="en-US" sz="1100" dirty="0">
+                <a:solidFill>
+                  <a:schemeClr val="bg1"/>
                 </a:solidFill>
                 <a:latin typeface="Consolas" pitchFamily="34" charset="0"/>
                 <a:ea typeface="Consolas" pitchFamily="34" charset="-122"/>
                 <a:cs typeface="Consolas" pitchFamily="34" charset="-120"/>
               </a:rPr>
+              <a:t>v0.4.2</a:t>
+            </a:r>
+            <a:endParaRPr lang="en-US" sz="1100" dirty="0"/>
+          </a:p>
+        </p:txBody>
+      </p:sp>
+      <p:sp>
+        <p:nvSpPr>
+          <p:cNvPr id="13" name="Release task2-v1.0 628"/>
+          <p:cNvSpPr/>
+          <p:nvPr/>
+        </p:nvSpPr>
+        <p:spPr>
+          <a:xfrm>
+            <a:off x="9027871" y="1865376"/>
+            <a:ext cx="987552" cy="292608"/>
+          </a:xfrm>
+          <a:prstGeom prst="roundRect">
+            <a:avLst>
+              <a:gd name="adj" fmla="val 50000"/>
+            </a:avLst>
+          </a:prstGeom>
+          <a:solidFill>
+            <a:schemeClr val="accent1"/>
+          </a:solidFill>
+          <a:ln/>
+        </p:spPr>
+        <p:txBody>
+          <a:bodyPr wrap="square" lIns="25400" tIns="25400" rIns="25400" bIns="25400" rtlCol="0" anchor="ctr"/>
+          <a:lstStyle/>
+          <a:p>
+            <a:pPr algn="ctr" indent="0" marL="0">
+              <a:buNone/>
+            </a:pPr>
+            <a:r>
+              <a:rPr lang="en-US" sz="1100" b="1" dirty="0">
+                <a:solidFill>
+                  <a:schemeClr val="tx1"/>
+                </a:solidFill>
+                <a:latin typeface="Consolas" pitchFamily="34" charset="0"/>
+                <a:ea typeface="Consolas" pitchFamily="34" charset="-122"/>
+                <a:cs typeface="Consolas" pitchFamily="34" charset="-120"/>
+              </a:rPr>
               <a:t>task2-v1.0</a:t>
             </a:r>
             <a:endParaRPr lang="en-US" sz="1100" dirty="0"/>
@@ -9522,14 +9565,14 @@
       </p:sp>
       <p:sp>
         <p:nvSpPr>
-          <p:cNvPr id="13" name="Release v1.0.0 in Task 3 628"/>
-          <p:cNvSpPr/>
-          <p:nvPr/>
-        </p:nvSpPr>
-        <p:spPr>
-          <a:xfrm>
-            <a:off x="10042855" y="1865376"/>
-            <a:ext cx="1417320" cy="292608"/>
+          <p:cNvPr id="14" name="Release v1.0.0 in Task 3 629"/>
+          <p:cNvSpPr/>
+          <p:nvPr/>
+        </p:nvSpPr>
+        <p:spPr>
+          <a:xfrm>
+            <a:off x="10088575" y="1865376"/>
+            <a:ext cx="1371600" cy="292608"/>
           </a:xfrm>
           <a:prstGeom prst="roundRect">
             <a:avLst>
@@ -9570,7 +9613,7 @@
       </p:sp>
       <p:sp>
         <p:nvSpPr>
-          <p:cNvPr id="14" name="Branch 001 629"/>
+          <p:cNvPr id="15" name="Branch 001 630"/>
           <p:cNvSpPr/>
           <p:nvPr/>
         </p:nvSpPr>
@@ -9613,7 +9656,7 @@
       </p:sp>
       <p:sp>
         <p:nvSpPr>
-          <p:cNvPr id="15" name="Branch 002 630"/>
+          <p:cNvPr id="16" name="Branch 002 631"/>
           <p:cNvSpPr/>
           <p:nvPr/>
         </p:nvSpPr>
@@ -9656,7 +9699,7 @@
       </p:sp>
       <p:sp>
         <p:nvSpPr>
-          <p:cNvPr id="16" name="Branch 003 631"/>
+          <p:cNvPr id="17" name="Branch 003 632"/>
           <p:cNvSpPr/>
           <p:nvPr/>
         </p:nvSpPr>
@@ -9699,7 +9742,7 @@
       </p:sp>
       <p:sp>
         <p:nvSpPr>
-          <p:cNvPr id="17" name="Branch 004 632"/>
+          <p:cNvPr id="18" name="Branch 004 633"/>
           <p:cNvSpPr/>
           <p:nvPr/>
         </p:nvSpPr>
@@ -9742,7 +9785,7 @@
       </p:sp>
       <p:sp>
         <p:nvSpPr>
-          <p:cNvPr id="18" name="Branch 005 633"/>
+          <p:cNvPr id="19" name="Branch 005 634"/>
           <p:cNvSpPr/>
           <p:nvPr/>
         </p:nvSpPr>
@@ -9785,7 +9828,7 @@
       </p:sp>
       <p:sp>
         <p:nvSpPr>
-          <p:cNvPr id="19" name="Branch 006 634"/>
+          <p:cNvPr id="20" name="Branch 006 635"/>
           <p:cNvSpPr/>
           <p:nvPr/>
         </p:nvSpPr>
@@ -9828,7 +9871,7 @@
       </p:sp>
       <p:sp>
         <p:nvSpPr>
-          <p:cNvPr id="20" name="Branch 007 635"/>
+          <p:cNvPr id="21" name="Branch 007 636"/>
           <p:cNvSpPr/>
           <p:nvPr/>
         </p:nvSpPr>
@@ -9871,7 +9914,7 @@
       </p:sp>
       <p:sp>
         <p:nvSpPr>
-          <p:cNvPr id="21" name="Branch 008 636"/>
+          <p:cNvPr id="22" name="Branch 008 637"/>
           <p:cNvSpPr/>
           <p:nvPr/>
         </p:nvSpPr>
@@ -9914,7 +9957,7 @@
       </p:sp>
       <p:sp>
         <p:nvSpPr>
-          <p:cNvPr id="22" name="Branch 009 637"/>
+          <p:cNvPr id="23" name="Branch 009 638"/>
           <p:cNvSpPr/>
           <p:nvPr/>
         </p:nvSpPr>
@@ -9957,7 +10000,7 @@
       </p:sp>
       <p:sp>
         <p:nvSpPr>
-          <p:cNvPr id="23" name="Branch 010 638"/>
+          <p:cNvPr id="24" name="Branch 010 639"/>
           <p:cNvSpPr/>
           <p:nvPr/>
         </p:nvSpPr>
@@ -10000,7 +10043,7 @@
       </p:sp>
       <p:sp>
         <p:nvSpPr>
-          <p:cNvPr id="24" name="Branch 011 639"/>
+          <p:cNvPr id="25" name="Branch 011 640"/>
           <p:cNvSpPr/>
           <p:nvPr/>
         </p:nvSpPr>
@@ -10043,7 +10086,7 @@
       </p:sp>
       <p:sp>
         <p:nvSpPr>
-          <p:cNvPr id="25" name="Branch 012 640"/>
+          <p:cNvPr id="26" name="Branch 012 641"/>
           <p:cNvSpPr/>
           <p:nvPr/>
         </p:nvSpPr>
@@ -10086,7 +10129,7 @@
       </p:sp>
       <p:sp>
         <p:nvSpPr>
-          <p:cNvPr id="26" name="Branch 013 641"/>
+          <p:cNvPr id="27" name="Branch 013 642"/>
           <p:cNvSpPr/>
           <p:nvPr/>
         </p:nvSpPr>
@@ -10129,7 +10172,7 @@
       </p:sp>
       <p:sp>
         <p:nvSpPr>
-          <p:cNvPr id="27" name="Branch 014 642"/>
+          <p:cNvPr id="28" name="Branch 014 643"/>
           <p:cNvSpPr/>
           <p:nvPr/>
         </p:nvSpPr>
@@ -10172,7 +10215,7 @@
       </p:sp>
       <p:sp>
         <p:nvSpPr>
-          <p:cNvPr id="28" name="Branch 015 643"/>
+          <p:cNvPr id="29" name="Branch 015 644"/>
           <p:cNvSpPr/>
           <p:nvPr/>
         </p:nvSpPr>
@@ -10215,7 +10258,7 @@
       </p:sp>
       <p:sp>
         <p:nvSpPr>
-          <p:cNvPr id="29" name="Branch 016 644"/>
+          <p:cNvPr id="30" name="Branch 016 645"/>
           <p:cNvSpPr/>
           <p:nvPr/>
         </p:nvSpPr>
@@ -10258,7 +10301,7 @@
       </p:sp>
       <p:sp>
         <p:nvSpPr>
-          <p:cNvPr id="30" name="Branch 017 645"/>
+          <p:cNvPr id="31" name="Branch 017 646"/>
           <p:cNvSpPr/>
           <p:nvPr/>
         </p:nvSpPr>
@@ -10301,7 +10344,7 @@
       </p:sp>
       <p:sp>
         <p:nvSpPr>
-          <p:cNvPr id="31" name="Branch 018 646"/>
+          <p:cNvPr id="32" name="Branch 018 647"/>
           <p:cNvSpPr/>
           <p:nvPr/>
         </p:nvSpPr>
@@ -10344,7 +10387,7 @@
       </p:sp>
       <p:sp>
         <p:nvSpPr>
-          <p:cNvPr id="32" name="Branch 019 647"/>
+          <p:cNvPr id="33" name="Branch 019 648"/>
           <p:cNvSpPr/>
           <p:nvPr/>
         </p:nvSpPr>
@@ -10387,7 +10430,7 @@
       </p:sp>
       <p:sp>
         <p:nvSpPr>
-          <p:cNvPr id="33" name="Branch 020 648"/>
+          <p:cNvPr id="34" name="Branch 020 649"/>
           <p:cNvSpPr/>
           <p:nvPr/>
         </p:nvSpPr>
@@ -10430,7 +10473,7 @@
       </p:sp>
       <p:sp>
         <p:nvSpPr>
-          <p:cNvPr id="34" name="Branch 021 649"/>
+          <p:cNvPr id="35" name="Branch 021 650"/>
           <p:cNvSpPr/>
           <p:nvPr/>
         </p:nvSpPr>
@@ -10473,7 +10516,7 @@
       </p:sp>
       <p:sp>
         <p:nvSpPr>
-          <p:cNvPr id="35" name="Branch 022 650"/>
+          <p:cNvPr id="36" name="Branch 022 651"/>
           <p:cNvSpPr/>
           <p:nvPr/>
         </p:nvSpPr>
@@ -10516,7 +10559,7 @@
       </p:sp>
       <p:sp>
         <p:nvSpPr>
-          <p:cNvPr id="36" name="Card 651"/>
+          <p:cNvPr id="37" name="Card 652"/>
           <p:cNvSpPr/>
           <p:nvPr/>
         </p:nvSpPr>
@@ -10550,7 +10593,7 @@
       </p:sp>
       <p:sp>
         <p:nvSpPr>
-          <p:cNvPr id="37" name="Icon doc 652"/>
+          <p:cNvPr id="38" name="Icon doc 653"/>
           <p:cNvSpPr/>
           <p:nvPr/>
         </p:nvSpPr>
@@ -10570,7 +10613,7 @@
       </p:sp>
       <p:sp>
         <p:nvSpPr>
-          <p:cNvPr id="38" name="Glyph part 654"/>
+          <p:cNvPr id="39" name="Glyph part 655"/>
           <p:cNvSpPr/>
           <p:nvPr/>
         </p:nvSpPr>
@@ -10590,7 +10633,7 @@
       </p:sp>
       <p:sp>
         <p:nvSpPr>
-          <p:cNvPr id="39" name="Glyph part 655"/>
+          <p:cNvPr id="40" name="Glyph part 656"/>
           <p:cNvSpPr/>
           <p:nvPr/>
         </p:nvSpPr>
@@ -10610,7 +10653,7 @@
       </p:sp>
       <p:sp>
         <p:nvSpPr>
-          <p:cNvPr id="40" name="Glyph part 656"/>
+          <p:cNvPr id="41" name="Glyph part 657"/>
           <p:cNvSpPr/>
           <p:nvPr/>
         </p:nvSpPr>
@@ -10630,7 +10673,7 @@
       </p:sp>
       <p:sp>
         <p:nvSpPr>
-          <p:cNvPr id="41" name="Text 657"/>
+          <p:cNvPr id="42" name="Text 658"/>
           <p:cNvSpPr txBox="1"/>
           <p:nvPr/>
         </p:nvSpPr>
@@ -10666,7 +10709,7 @@
       </p:sp>
       <p:sp>
         <p:nvSpPr>
-          <p:cNvPr id="42" name="Text 658"/>
+          <p:cNvPr id="43" name="Text 659"/>
           <p:cNvSpPr txBox="1"/>
           <p:nvPr/>
         </p:nvSpPr>
@@ -10702,7 +10745,7 @@
       </p:sp>
       <p:sp>
         <p:nvSpPr>
-          <p:cNvPr id="43" name="Card 659"/>
+          <p:cNvPr id="44" name="Card 660"/>
           <p:cNvSpPr/>
           <p:nvPr/>
         </p:nvSpPr>
@@ -10736,7 +10779,7 @@
       </p:sp>
       <p:sp>
         <p:nvSpPr>
-          <p:cNvPr id="44" name="Icon camera 660"/>
+          <p:cNvPr id="45" name="Icon camera 661"/>
           <p:cNvSpPr/>
           <p:nvPr/>
         </p:nvSpPr>
@@ -10756,7 +10799,7 @@
       </p:sp>
       <p:sp>
         <p:nvSpPr>
-          <p:cNvPr id="45" name="Glyph part 662"/>
+          <p:cNvPr id="46" name="Glyph part 663"/>
           <p:cNvSpPr/>
           <p:nvPr/>
         </p:nvSpPr>
@@ -10776,7 +10819,7 @@
       </p:sp>
       <p:sp>
         <p:nvSpPr>
-          <p:cNvPr id="46" name="Glyph part 663"/>
+          <p:cNvPr id="47" name="Glyph part 664"/>
           <p:cNvSpPr/>
           <p:nvPr/>
         </p:nvSpPr>
@@ -10798,7 +10841,7 @@
       </p:sp>
       <p:sp>
         <p:nvSpPr>
-          <p:cNvPr id="47" name="Glyph part 664"/>
+          <p:cNvPr id="48" name="Glyph part 665"/>
           <p:cNvSpPr/>
           <p:nvPr/>
         </p:nvSpPr>
@@ -10818,7 +10861,7 @@
       </p:sp>
       <p:sp>
         <p:nvSpPr>
-          <p:cNvPr id="48" name="Glyph part 665"/>
+          <p:cNvPr id="49" name="Glyph part 666"/>
           <p:cNvSpPr/>
           <p:nvPr/>
         </p:nvSpPr>
@@ -10838,7 +10881,7 @@
       </p:sp>
       <p:sp>
         <p:nvSpPr>
-          <p:cNvPr id="49" name="Text 666"/>
+          <p:cNvPr id="50" name="Text 667"/>
           <p:cNvSpPr txBox="1"/>
           <p:nvPr/>
         </p:nvSpPr>
@@ -10874,7 +10917,7 @@
       </p:sp>
       <p:sp>
         <p:nvSpPr>
-          <p:cNvPr id="50" name="Text 667"/>
+          <p:cNvPr id="51" name="Text 668"/>
           <p:cNvSpPr txBox="1"/>
           <p:nvPr/>
         </p:nvSpPr>
@@ -10910,7 +10953,7 @@
       </p:sp>
       <p:sp>
         <p:nvSpPr>
-          <p:cNvPr id="51" name="Card 668"/>
+          <p:cNvPr id="52" name="Card 669"/>
           <p:cNvSpPr/>
           <p:nvPr/>
         </p:nvSpPr>
@@ -10944,7 +10987,7 @@
       </p:sp>
       <p:sp>
         <p:nvSpPr>
-          <p:cNvPr id="52" name="Icon clock 669"/>
+          <p:cNvPr id="53" name="Icon clock 670"/>
           <p:cNvSpPr/>
           <p:nvPr/>
         </p:nvSpPr>
@@ -10964,7 +11007,7 @@
       </p:sp>
       <p:sp>
         <p:nvSpPr>
-          <p:cNvPr id="53" name="Glyph part 671"/>
+          <p:cNvPr id="54" name="Glyph part 672"/>
           <p:cNvSpPr/>
           <p:nvPr/>
         </p:nvSpPr>
@@ -10987,7 +11030,7 @@
       </p:sp>
       <p:sp>
         <p:nvSpPr>
-          <p:cNvPr id="54" name="Glyph stroke 672"/>
+          <p:cNvPr id="55" name="Glyph stroke 673"/>
           <p:cNvSpPr/>
           <p:nvPr/>
         </p:nvSpPr>
@@ -11010,7 +11053,7 @@
       </p:sp>
       <p:sp>
         <p:nvSpPr>
-          <p:cNvPr id="55" name="Glyph stroke 673"/>
+          <p:cNvPr id="56" name="Glyph stroke 674"/>
           <p:cNvSpPr/>
           <p:nvPr/>
         </p:nvSpPr>
@@ -11033,7 +11076,7 @@
       </p:sp>
       <p:sp>
         <p:nvSpPr>
-          <p:cNvPr id="56" name="Text 674"/>
+          <p:cNvPr id="57" name="Text 675"/>
           <p:cNvSpPr txBox="1"/>
           <p:nvPr/>
         </p:nvSpPr>
@@ -11069,7 +11112,7 @@
       </p:sp>
       <p:sp>
         <p:nvSpPr>
-          <p:cNvPr id="57" name="Text 675"/>
+          <p:cNvPr id="58" name="Text 676"/>
           <p:cNvSpPr txBox="1"/>
           <p:nvPr/>
         </p:nvSpPr>
@@ -11105,7 +11148,7 @@
       </p:sp>
       <p:sp>
         <p:nvSpPr>
-          <p:cNvPr id="58" name="Card 676"/>
+          <p:cNvPr id="59" name="Card 677"/>
           <p:cNvSpPr/>
           <p:nvPr/>
         </p:nvSpPr>
@@ -11139,7 +11182,7 @@
       </p:sp>
       <p:sp>
         <p:nvSpPr>
-          <p:cNvPr id="59" name="Icon bolt 677"/>
+          <p:cNvPr id="60" name="Icon bolt 678"/>
           <p:cNvSpPr/>
           <p:nvPr/>
         </p:nvSpPr>
@@ -11159,7 +11202,7 @@
       </p:sp>
       <p:sp>
         <p:nvSpPr>
-          <p:cNvPr id="60" name="Glyph part 679"/>
+          <p:cNvPr id="61" name="Glyph part 680"/>
           <p:cNvSpPr/>
           <p:nvPr/>
         </p:nvSpPr>
@@ -11179,7 +11222,7 @@
       </p:sp>
       <p:sp>
         <p:nvSpPr>
-          <p:cNvPr id="61" name="Text 680"/>
+          <p:cNvPr id="62" name="Text 681"/>
           <p:cNvSpPr txBox="1"/>
           <p:nvPr/>
         </p:nvSpPr>
@@ -11215,7 +11258,7 @@
       </p:sp>
       <p:sp>
         <p:nvSpPr>
-          <p:cNvPr id="62" name="Text 681"/>
+          <p:cNvPr id="63" name="Text 682"/>
           <p:cNvSpPr txBox="1"/>
           <p:nvPr/>
         </p:nvSpPr>
@@ -11251,7 +11294,7 @@
       </p:sp>
       <p:sp>
         <p:nvSpPr>
-          <p:cNvPr id="63" name="Card 682"/>
+          <p:cNvPr id="64" name="Card 683"/>
           <p:cNvSpPr/>
           <p:nvPr/>
         </p:nvSpPr>
@@ -11285,7 +11328,7 @@
       </p:sp>
       <p:sp>
         <p:nvSpPr>
-          <p:cNvPr id="64" name="Icon tag 683"/>
+          <p:cNvPr id="65" name="Icon tag 684"/>
           <p:cNvSpPr/>
           <p:nvPr/>
         </p:nvSpPr>
@@ -11305,7 +11348,7 @@
       </p:sp>
       <p:sp>
         <p:nvSpPr>
-          <p:cNvPr id="65" name="Glyph part 685"/>
+          <p:cNvPr id="66" name="Glyph part 686"/>
           <p:cNvSpPr/>
           <p:nvPr/>
         </p:nvSpPr>
@@ -11325,7 +11368,7 @@
       </p:sp>
       <p:sp>
         <p:nvSpPr>
-          <p:cNvPr id="66" name="Glyph part 686"/>
+          <p:cNvPr id="67" name="Glyph part 687"/>
           <p:cNvSpPr/>
           <p:nvPr/>
         </p:nvSpPr>
@@ -11345,7 +11388,7 @@
       </p:sp>
       <p:sp>
         <p:nvSpPr>
-          <p:cNvPr id="67" name="Text 687"/>
+          <p:cNvPr id="68" name="Text 688"/>
           <p:cNvSpPr txBox="1"/>
           <p:nvPr/>
         </p:nvSpPr>
@@ -11381,7 +11424,7 @@
       </p:sp>
       <p:sp>
         <p:nvSpPr>
-          <p:cNvPr id="68" name="Text 688"/>
+          <p:cNvPr id="69" name="Text 689"/>
           <p:cNvSpPr txBox="1"/>
           <p:nvPr/>
         </p:nvSpPr>
@@ -11525,7 +11568,7 @@
       </p:sp>
       <p:sp>
         <p:nvSpPr>
-          <p:cNvPr id="4" name="Icon browser 689"/>
+          <p:cNvPr id="4" name="Icon browser 690"/>
           <p:cNvSpPr/>
           <p:nvPr/>
         </p:nvSpPr>
@@ -11545,7 +11588,7 @@
       </p:sp>
       <p:sp>
         <p:nvSpPr>
-          <p:cNvPr id="5" name="Glyph part 691"/>
+          <p:cNvPr id="5" name="Glyph part 692"/>
           <p:cNvSpPr/>
           <p:nvPr/>
         </p:nvSpPr>
@@ -11568,7 +11611,7 @@
       </p:sp>
       <p:sp>
         <p:nvSpPr>
-          <p:cNvPr id="6" name="Glyph part 692"/>
+          <p:cNvPr id="6" name="Glyph part 693"/>
           <p:cNvSpPr/>
           <p:nvPr/>
         </p:nvSpPr>
@@ -11588,7 +11631,7 @@
       </p:sp>
       <p:sp>
         <p:nvSpPr>
-          <p:cNvPr id="7" name="Text 693"/>
+          <p:cNvPr id="7" name="Text 694"/>
           <p:cNvSpPr txBox="1"/>
           <p:nvPr/>
         </p:nvSpPr>
@@ -11624,7 +11667,7 @@
       </p:sp>
       <p:sp>
         <p:nvSpPr>
-          <p:cNvPr id="8" name="Icon branch 694"/>
+          <p:cNvPr id="8" name="Icon branch 695"/>
           <p:cNvSpPr/>
           <p:nvPr/>
         </p:nvSpPr>
@@ -11644,7 +11687,7 @@
       </p:sp>
       <p:sp>
         <p:nvSpPr>
-          <p:cNvPr id="9" name="Glyph stroke 696"/>
+          <p:cNvPr id="9" name="Glyph stroke 697"/>
           <p:cNvSpPr/>
           <p:nvPr/>
         </p:nvSpPr>
@@ -11667,7 +11710,7 @@
       </p:sp>
       <p:sp>
         <p:nvSpPr>
-          <p:cNvPr id="10" name="Glyph stroke 697"/>
+          <p:cNvPr id="10" name="Glyph stroke 698"/>
           <p:cNvSpPr/>
           <p:nvPr/>
         </p:nvSpPr>
@@ -11690,7 +11733,7 @@
       </p:sp>
       <p:sp>
         <p:nvSpPr>
-          <p:cNvPr id="11" name="Glyph part 698"/>
+          <p:cNvPr id="11" name="Glyph part 699"/>
           <p:cNvSpPr/>
           <p:nvPr/>
         </p:nvSpPr>
@@ -11710,7 +11753,7 @@
       </p:sp>
       <p:sp>
         <p:nvSpPr>
-          <p:cNvPr id="12" name="Glyph part 699"/>
+          <p:cNvPr id="12" name="Glyph part 700"/>
           <p:cNvSpPr/>
           <p:nvPr/>
         </p:nvSpPr>
@@ -11730,7 +11773,7 @@
       </p:sp>
       <p:sp>
         <p:nvSpPr>
-          <p:cNvPr id="13" name="Glyph part 700"/>
+          <p:cNvPr id="13" name="Glyph part 701"/>
           <p:cNvSpPr/>
           <p:nvPr/>
         </p:nvSpPr>
@@ -11750,7 +11793,7 @@
       </p:sp>
       <p:sp>
         <p:nvSpPr>
-          <p:cNvPr id="14" name="Text 701"/>
+          <p:cNvPr id="14" name="Text 702"/>
           <p:cNvSpPr txBox="1"/>
           <p:nvPr/>
         </p:nvSpPr>
@@ -11786,7 +11829,7 @@
       </p:sp>
       <p:sp>
         <p:nvSpPr>
-          <p:cNvPr id="15" name="Icon person 702"/>
+          <p:cNvPr id="15" name="Icon person 703"/>
           <p:cNvSpPr/>
           <p:nvPr/>
         </p:nvSpPr>
@@ -11806,7 +11849,7 @@
       </p:sp>
       <p:sp>
         <p:nvSpPr>
-          <p:cNvPr id="16" name="Glyph part 704"/>
+          <p:cNvPr id="16" name="Glyph part 705"/>
           <p:cNvSpPr/>
           <p:nvPr/>
         </p:nvSpPr>
@@ -11826,7 +11869,7 @@
       </p:sp>
       <p:sp>
         <p:nvSpPr>
-          <p:cNvPr id="17" name="Glyph part 705"/>
+          <p:cNvPr id="17" name="Glyph part 706"/>
           <p:cNvSpPr/>
           <p:nvPr/>
         </p:nvSpPr>
@@ -11846,7 +11889,7 @@
       </p:sp>
       <p:sp>
         <p:nvSpPr>
-          <p:cNvPr id="18" name="Text 706"/>
+          <p:cNvPr id="18" name="Text 707"/>
           <p:cNvSpPr txBox="1"/>
           <p:nvPr/>
         </p:nvSpPr>
@@ -11882,7 +11925,7 @@
       </p:sp>
       <p:sp>
         <p:nvSpPr>
-          <p:cNvPr id="19" name="Text 707"/>
+          <p:cNvPr id="19" name="Text 708"/>
           <p:cNvSpPr txBox="1"/>
           <p:nvPr/>
         </p:nvSpPr>
@@ -15048,7 +15091,7 @@
                   <a:schemeClr val="tx2"/>
                 </a:solidFill>
               </a:rPr>
-              <a:t>Deployed by the pipeline only, and live as v0.4.1</a:t>
+              <a:t>Deployed by the pipeline only, and live as v0.4.2</a:t>
             </a:r>
             <a:endParaRPr lang="en-US" sz="1400" dirty="0"/>
           </a:p>
